--- a/Slides/L8_Functions.pptx
+++ b/Slides/L8_Functions.pptx
@@ -964,7 +964,12 @@
             <p:ph type="sldImg"/>
           </p:nvPr>
         </p:nvSpPr>
-        <p:spPr/>
+        <p:spPr>
+          <a:xfrm>
+            <a:off x="0" y="763588"/>
+            <a:ext cx="0" cy="0"/>
+          </a:xfrm>
+        </p:spPr>
       </p:sp>
       <p:sp>
         <p:nvSpPr>
@@ -1039,7 +1044,12 @@
             <p:ph type="sldImg"/>
           </p:nvPr>
         </p:nvSpPr>
-        <p:spPr/>
+        <p:spPr>
+          <a:xfrm>
+            <a:off x="0" y="763588"/>
+            <a:ext cx="0" cy="0"/>
+          </a:xfrm>
+        </p:spPr>
       </p:sp>
       <p:sp>
         <p:nvSpPr>
@@ -2244,7 +2254,12 @@
             <p:ph type="sldImg"/>
           </p:nvPr>
         </p:nvSpPr>
-        <p:spPr/>
+        <p:spPr>
+          <a:xfrm>
+            <a:off x="0" y="763588"/>
+            <a:ext cx="0" cy="0"/>
+          </a:xfrm>
+        </p:spPr>
       </p:sp>
       <p:sp>
         <p:nvSpPr>
@@ -4494,7 +4509,12 @@
             <p:ph type="sldImg"/>
           </p:nvPr>
         </p:nvSpPr>
-        <p:spPr/>
+        <p:spPr>
+          <a:xfrm>
+            <a:off x="0" y="763588"/>
+            <a:ext cx="0" cy="0"/>
+          </a:xfrm>
+        </p:spPr>
       </p:sp>
       <p:sp>
         <p:nvSpPr>
@@ -44933,8 +44953,8 @@
         </p:nvSpPr>
         <p:spPr>
           <a:xfrm>
-            <a:off x="580041" y="1949942"/>
-            <a:ext cx="8135334" cy="5593858"/>
+            <a:off x="580040" y="1949942"/>
+            <a:ext cx="9094901" cy="4893647"/>
           </a:xfrm>
           <a:prstGeom prst="rect">
             <a:avLst/>
@@ -44956,13 +44976,13 @@
               </a:tabLst>
             </a:pPr>
             <a:r>
-              <a:rPr sz="2400" b="0">
+              <a:rPr sz="2400" b="0" dirty="0">
                 <a:latin typeface="Cambria"/>
               </a:rPr>
               <a:t>The compiler reads the file </a:t>
             </a:r>
             <a:r>
-              <a:rPr sz="2400" b="1">
+              <a:rPr sz="2400" b="1" dirty="0">
                 <a:latin typeface="Cambria"/>
               </a:rPr>
               <a:t>top to bottom</a:t>
@@ -44978,7 +44998,7 @@
               </a:tabLst>
             </a:pPr>
             <a:r>
-              <a:rPr sz="2400">
+              <a:rPr sz="2400" dirty="0">
                 <a:latin typeface="Cambria"/>
               </a:rPr>
               <a:t> </a:t>
@@ -44994,13 +45014,13 @@
               </a:tabLst>
             </a:pPr>
             <a:r>
-              <a:rPr sz="2400" b="0">
+              <a:rPr sz="2400" b="0" dirty="0">
                 <a:latin typeface="Cambria"/>
               </a:rPr>
               <a:t>A call to a function it has not seen yet is an </a:t>
             </a:r>
             <a:r>
-              <a:rPr sz="2400" b="1">
+              <a:rPr sz="2400" b="1" dirty="0">
                 <a:latin typeface="Cambria"/>
               </a:rPr>
               <a:t>error</a:t>
@@ -45016,7 +45036,7 @@
               </a:tabLst>
             </a:pPr>
             <a:r>
-              <a:rPr sz="2400">
+              <a:rPr sz="2400" dirty="0">
                 <a:latin typeface="Cambria"/>
               </a:rPr>
               <a:t> </a:t>
@@ -45032,19 +45052,19 @@
               </a:tabLst>
             </a:pPr>
             <a:r>
-              <a:rPr sz="2400" b="0">
+              <a:rPr sz="2400" b="0" dirty="0">
                 <a:latin typeface="Cambria"/>
               </a:rPr>
               <a:t>Fix it with a </a:t>
             </a:r>
             <a:r>
-              <a:rPr sz="2400" b="1">
+              <a:rPr sz="2400" b="1" dirty="0">
                 <a:latin typeface="Cambria"/>
               </a:rPr>
               <a:t>prototype</a:t>
             </a:r>
             <a:r>
-              <a:rPr sz="2400" b="0">
+              <a:rPr sz="2400" b="0" dirty="0">
                 <a:latin typeface="Cambria"/>
               </a:rPr>
               <a:t> - the signature alone:</a:t>
@@ -45060,7 +45080,7 @@
               </a:tabLst>
             </a:pPr>
             <a:r>
-              <a:rPr sz="2400">
+              <a:rPr sz="2400" dirty="0">
                 <a:latin typeface="Cambria"/>
               </a:rPr>
               <a:t> </a:t>
@@ -45076,11 +45096,32 @@
               </a:tabLst>
             </a:pPr>
             <a:r>
-              <a:rPr sz="2400" b="0">
-                <a:latin typeface="Cambria"/>
-              </a:rPr>
-              <a:t>	float adc_to_psi ( uint32_t counts ) ;</a:t>
-            </a:r>
+              <a:rPr sz="2400" b="0" dirty="0">
+                <a:latin typeface="Cambria"/>
+              </a:rPr>
+              <a:t>	float </a:t>
+            </a:r>
+            <a:r>
+              <a:rPr sz="2400" b="0" dirty="0" err="1">
+                <a:latin typeface="Cambria"/>
+              </a:rPr>
+              <a:t>adc_to_psi</a:t>
+            </a:r>
+            <a:r>
+              <a:rPr sz="2400" b="0" dirty="0">
+                <a:latin typeface="Cambria"/>
+              </a:rPr>
+              <a:t> ( uint32_t counts ) </a:t>
+            </a:r>
+            <a:r>
+              <a:rPr sz="2400" b="0" dirty="0" smtClean="0">
+                <a:latin typeface="Cambria"/>
+              </a:rPr>
+              <a:t>;</a:t>
+            </a:r>
+            <a:endParaRPr lang="en-US" sz="2400" b="0" dirty="0" smtClean="0">
+              <a:latin typeface="Cambria"/>
+            </a:endParaRPr>
           </a:p>
           <a:p>
             <a:pPr>
@@ -45091,12 +45132,9 @@
                 <a:tab pos="2194560" algn="l"/>
               </a:tabLst>
             </a:pPr>
-            <a:r>
-              <a:rPr sz="2400">
-                <a:latin typeface="Cambria"/>
-              </a:rPr>
-              <a:t> </a:t>
-            </a:r>
+            <a:endParaRPr lang="en-US" sz="2400" dirty="0">
+              <a:latin typeface="Cambria"/>
+            </a:endParaRPr>
           </a:p>
           <a:p>
             <a:pPr>
@@ -45108,7 +45146,101 @@
               </a:tabLst>
             </a:pPr>
             <a:r>
-              <a:rPr sz="2400" b="0">
+              <a:rPr lang="en-US" sz="2400" b="0" dirty="0" smtClean="0">
+                <a:latin typeface="Cambria"/>
+              </a:rPr>
+              <a:t>Better yet</a:t>
+            </a:r>
+          </a:p>
+          <a:p>
+            <a:pPr>
+              <a:tabLst>
+                <a:tab pos="548640" algn="l"/>
+                <a:tab pos="1097280" algn="l"/>
+                <a:tab pos="1645920" algn="l"/>
+                <a:tab pos="2194560" algn="l"/>
+              </a:tabLst>
+            </a:pPr>
+            <a:endParaRPr lang="en-US" sz="2400" dirty="0">
+              <a:latin typeface="Cambria"/>
+            </a:endParaRPr>
+          </a:p>
+          <a:p>
+            <a:pPr>
+              <a:tabLst>
+                <a:tab pos="548640" algn="l"/>
+                <a:tab pos="1097280" algn="l"/>
+                <a:tab pos="1645920" algn="l"/>
+                <a:tab pos="2194560" algn="l"/>
+              </a:tabLst>
+            </a:pPr>
+            <a:r>
+              <a:rPr lang="en-US" sz="2400" b="1" dirty="0">
+                <a:latin typeface="Cambria"/>
+              </a:rPr>
+              <a:t>e</a:t>
+            </a:r>
+            <a:r>
+              <a:rPr lang="en-US" sz="2400" b="1" dirty="0" smtClean="0">
+                <a:latin typeface="Cambria"/>
+              </a:rPr>
+              <a:t>xtern</a:t>
+            </a:r>
+            <a:r>
+              <a:rPr lang="en-US" sz="2400" b="0" dirty="0" smtClean="0">
+                <a:latin typeface="Cambria"/>
+              </a:rPr>
+              <a:t> float </a:t>
+            </a:r>
+            <a:r>
+              <a:rPr lang="en-US" sz="2400" b="0" dirty="0" err="1" smtClean="0">
+                <a:latin typeface="Cambria"/>
+              </a:rPr>
+              <a:t>adc_to_psi</a:t>
+            </a:r>
+            <a:r>
+              <a:rPr lang="en-US" sz="2400" b="0" dirty="0" smtClean="0">
+                <a:latin typeface="Cambria"/>
+              </a:rPr>
+              <a:t>( uint32_t counts ) ; </a:t>
+            </a:r>
+            <a:r>
+              <a:rPr lang="en-US" sz="1600" b="0" dirty="0" smtClean="0">
+                <a:latin typeface="Cambria"/>
+              </a:rPr>
+              <a:t>// not necessary but shows intention</a:t>
+            </a:r>
+            <a:endParaRPr sz="1600" b="0" dirty="0">
+              <a:latin typeface="Cambria"/>
+            </a:endParaRPr>
+          </a:p>
+          <a:p>
+            <a:pPr>
+              <a:tabLst>
+                <a:tab pos="548640" algn="l"/>
+                <a:tab pos="1097280" algn="l"/>
+                <a:tab pos="1645920" algn="l"/>
+                <a:tab pos="2194560" algn="l"/>
+              </a:tabLst>
+            </a:pPr>
+            <a:r>
+              <a:rPr sz="2400" dirty="0">
+                <a:latin typeface="Cambria"/>
+              </a:rPr>
+              <a:t> </a:t>
+            </a:r>
+          </a:p>
+          <a:p>
+            <a:pPr>
+              <a:tabLst>
+                <a:tab pos="548640" algn="l"/>
+                <a:tab pos="1097280" algn="l"/>
+                <a:tab pos="1645920" algn="l"/>
+                <a:tab pos="2194560" algn="l"/>
+              </a:tabLst>
+            </a:pPr>
+            <a:r>
+              <a:rPr sz="2400" b="0" dirty="0">
                 <a:latin typeface="Cambria"/>
               </a:rPr>
               <a:t>Rust does not care about order</a:t>
@@ -45268,7 +45400,7 @@
         <p:spPr>
           <a:xfrm>
             <a:off x="580041" y="1949942"/>
-            <a:ext cx="8135334" cy="5593858"/>
+            <a:ext cx="8135334" cy="3046988"/>
           </a:xfrm>
           <a:prstGeom prst="rect">
             <a:avLst/>
@@ -45290,11 +45422,14 @@
               </a:tabLst>
             </a:pPr>
             <a:r>
-              <a:rPr sz="2400" b="0">
+              <a:rPr sz="2400" b="0" dirty="0" err="1">
                 <a:latin typeface="Cambria"/>
               </a:rPr>
               <a:t>sensor.h</a:t>
             </a:r>
+            <a:endParaRPr sz="2400" b="0" dirty="0">
+              <a:latin typeface="Cambria"/>
+            </a:endParaRPr>
           </a:p>
           <a:p>
             <a:pPr>
@@ -45306,10 +45441,22 @@
               </a:tabLst>
             </a:pPr>
             <a:r>
-              <a:rPr sz="2400" b="0">
-                <a:latin typeface="Cambria"/>
-              </a:rPr>
-              <a:t>	#ifndef SENSOR_H</a:t>
+              <a:rPr sz="2400" b="0" dirty="0">
+                <a:latin typeface="Cambria"/>
+              </a:rPr>
+              <a:t>	#</a:t>
+            </a:r>
+            <a:r>
+              <a:rPr sz="2400" b="0" dirty="0" err="1">
+                <a:latin typeface="Cambria"/>
+              </a:rPr>
+              <a:t>ifndef</a:t>
+            </a:r>
+            <a:r>
+              <a:rPr sz="2400" b="0" dirty="0">
+                <a:latin typeface="Cambria"/>
+              </a:rPr>
+              <a:t> SENSOR_H</a:t>
             </a:r>
           </a:p>
           <a:p>
@@ -45322,7 +45469,7 @@
               </a:tabLst>
             </a:pPr>
             <a:r>
-              <a:rPr sz="2400" b="0">
+              <a:rPr sz="2400" b="0" dirty="0">
                 <a:latin typeface="Cambria"/>
               </a:rPr>
               <a:t>	#define SENSOR_H</a:t>
@@ -45338,10 +45485,28 @@
               </a:tabLst>
             </a:pPr>
             <a:r>
-              <a:rPr sz="2400" b="0">
-                <a:latin typeface="Cambria"/>
-              </a:rPr>
-              <a:t>	float adc_to_psi ( uint32_t counts ) ;</a:t>
+              <a:rPr sz="2400" b="0" dirty="0">
+                <a:latin typeface="Cambria"/>
+              </a:rPr>
+              <a:t>	</a:t>
+            </a:r>
+            <a:r>
+              <a:rPr sz="2400" b="0" dirty="0" smtClean="0">
+                <a:latin typeface="Cambria"/>
+              </a:rPr>
+              <a:t>float </a:t>
+            </a:r>
+            <a:r>
+              <a:rPr sz="2400" b="0" dirty="0" err="1">
+                <a:latin typeface="Cambria"/>
+              </a:rPr>
+              <a:t>adc_to_psi</a:t>
+            </a:r>
+            <a:r>
+              <a:rPr sz="2400" b="0" dirty="0">
+                <a:latin typeface="Cambria"/>
+              </a:rPr>
+              <a:t> ( uint32_t counts ) ;</a:t>
             </a:r>
           </a:p>
           <a:p>
@@ -45354,11 +45519,20 @@
               </a:tabLst>
             </a:pPr>
             <a:r>
-              <a:rPr sz="2400" b="0">
-                <a:latin typeface="Cambria"/>
-              </a:rPr>
-              <a:t>	#endif</a:t>
-            </a:r>
+              <a:rPr sz="2400" b="0" dirty="0">
+                <a:latin typeface="Cambria"/>
+              </a:rPr>
+              <a:t>	#</a:t>
+            </a:r>
+            <a:r>
+              <a:rPr sz="2400" b="0" dirty="0" err="1">
+                <a:latin typeface="Cambria"/>
+              </a:rPr>
+              <a:t>endif</a:t>
+            </a:r>
+            <a:endParaRPr sz="2400" b="0" dirty="0">
+              <a:latin typeface="Cambria"/>
+            </a:endParaRPr>
           </a:p>
           <a:p>
             <a:pPr>
@@ -45370,7 +45544,7 @@
               </a:tabLst>
             </a:pPr>
             <a:r>
-              <a:rPr sz="2400">
+              <a:rPr sz="2400" dirty="0">
                 <a:latin typeface="Cambria"/>
               </a:rPr>
               <a:t> </a:t>
@@ -45386,11 +45560,14 @@
               </a:tabLst>
             </a:pPr>
             <a:r>
-              <a:rPr sz="2400" b="0">
+              <a:rPr sz="2400" b="0" dirty="0" err="1">
                 <a:latin typeface="Cambria"/>
               </a:rPr>
               <a:t>main.c</a:t>
             </a:r>
+            <a:endParaRPr sz="2400" b="0" dirty="0">
+              <a:latin typeface="Cambria"/>
+            </a:endParaRPr>
           </a:p>
           <a:p>
             <a:pPr>
@@ -45402,10 +45579,22 @@
               </a:tabLst>
             </a:pPr>
             <a:r>
-              <a:rPr sz="2400" b="0">
-                <a:latin typeface="Cambria"/>
-              </a:rPr>
-              <a:t>	#include "sensor.h"</a:t>
+              <a:rPr sz="2400" b="0" dirty="0">
+                <a:latin typeface="Cambria"/>
+              </a:rPr>
+              <a:t>	#include "</a:t>
+            </a:r>
+            <a:r>
+              <a:rPr sz="2400" b="0" dirty="0" err="1">
+                <a:latin typeface="Cambria"/>
+              </a:rPr>
+              <a:t>sensor.h</a:t>
+            </a:r>
+            <a:r>
+              <a:rPr sz="2400" b="0" dirty="0">
+                <a:latin typeface="Cambria"/>
+              </a:rPr>
+              <a:t>"</a:t>
             </a:r>
           </a:p>
         </p:txBody>
@@ -51077,7 +51266,7 @@
         <p:spPr>
           <a:xfrm>
             <a:off x="580041" y="1949942"/>
-            <a:ext cx="8135334" cy="5593858"/>
+            <a:ext cx="8135334" cy="3170099"/>
           </a:xfrm>
           <a:prstGeom prst="rect">
             <a:avLst/>
@@ -51096,10 +51285,16 @@
               </a:tabLst>
             </a:pPr>
             <a:r>
-              <a:rPr sz="2500" b="0">
-                <a:latin typeface="Cambria"/>
-              </a:rPr>
-              <a:t>fn show ( s : &amp;Sample ) { ... }</a:t>
+              <a:rPr sz="2500" b="0" dirty="0" err="1">
+                <a:latin typeface="Cambria"/>
+              </a:rPr>
+              <a:t>fn</a:t>
+            </a:r>
+            <a:r>
+              <a:rPr sz="2500" b="0" dirty="0">
+                <a:latin typeface="Cambria"/>
+              </a:rPr>
+              <a:t> show ( s : &amp;Sample ) { ... }</a:t>
             </a:r>
           </a:p>
           <a:p>
@@ -51109,7 +51304,7 @@
               </a:tabLst>
             </a:pPr>
             <a:r>
-              <a:rPr sz="2500">
+              <a:rPr sz="2500" dirty="0">
                 <a:latin typeface="Cambria"/>
               </a:rPr>
               <a:t> </a:t>
@@ -51122,10 +51317,22 @@
               </a:tabLst>
             </a:pPr>
             <a:r>
-              <a:rPr sz="2500" b="0">
-                <a:latin typeface="Cambria"/>
-              </a:rPr>
-              <a:t>show ( &amp;my_sample ) ;</a:t>
+              <a:rPr sz="2500" b="0" dirty="0">
+                <a:latin typeface="Cambria"/>
+              </a:rPr>
+              <a:t>show ( &amp;</a:t>
+            </a:r>
+            <a:r>
+              <a:rPr sz="2500" b="0" dirty="0" err="1">
+                <a:latin typeface="Cambria"/>
+              </a:rPr>
+              <a:t>my_sample</a:t>
+            </a:r>
+            <a:r>
+              <a:rPr sz="2500" b="0" dirty="0">
+                <a:latin typeface="Cambria"/>
+              </a:rPr>
+              <a:t> ) ;</a:t>
             </a:r>
           </a:p>
           <a:p>
@@ -51135,10 +51342,22 @@
               </a:tabLst>
             </a:pPr>
             <a:r>
-              <a:rPr sz="2500" b="0">
-                <a:latin typeface="Cambria"/>
-              </a:rPr>
-              <a:t>show ( &amp;my_sample ) ;	fine</a:t>
+              <a:rPr sz="2500" b="0" dirty="0">
+                <a:latin typeface="Cambria"/>
+              </a:rPr>
+              <a:t>show ( &amp;</a:t>
+            </a:r>
+            <a:r>
+              <a:rPr sz="2500" b="0" dirty="0" err="1">
+                <a:latin typeface="Cambria"/>
+              </a:rPr>
+              <a:t>my_sample</a:t>
+            </a:r>
+            <a:r>
+              <a:rPr sz="2500" b="0" dirty="0">
+                <a:latin typeface="Cambria"/>
+              </a:rPr>
+              <a:t> ) ;	fine</a:t>
             </a:r>
           </a:p>
           <a:p>
@@ -51148,7 +51367,7 @@
               </a:tabLst>
             </a:pPr>
             <a:r>
-              <a:rPr sz="2500">
+              <a:rPr sz="2500" dirty="0">
                 <a:latin typeface="Cambria"/>
               </a:rPr>
               <a:t> </a:t>
@@ -51161,13 +51380,13 @@
               </a:tabLst>
             </a:pPr>
             <a:r>
-              <a:rPr sz="2500" b="0">
+              <a:rPr sz="2500" b="0" dirty="0">
                 <a:latin typeface="Cambria"/>
               </a:rPr>
               <a:t>&amp; lends the instance </a:t>
             </a:r>
             <a:r>
-              <a:rPr sz="2500" b="1">
+              <a:rPr sz="2500" b="1" dirty="0">
                 <a:latin typeface="Cambria"/>
               </a:rPr>
               <a:t>read-only</a:t>
@@ -51180,7 +51399,7 @@
               </a:tabLst>
             </a:pPr>
             <a:r>
-              <a:rPr sz="2500">
+              <a:rPr sz="2500" dirty="0">
                 <a:latin typeface="Cambria"/>
               </a:rPr>
               <a:t> </a:t>
@@ -51193,29 +51412,46 @@
               </a:tabLst>
             </a:pPr>
             <a:r>
-              <a:rPr sz="2500" b="0">
-                <a:latin typeface="Cambria"/>
-              </a:rPr>
-              <a:t>Like const &amp; in C++, but the &amp; is </a:t>
-            </a:r>
-            <a:r>
-              <a:rPr sz="2500" b="1">
+              <a:rPr sz="2500" b="0" dirty="0">
+                <a:latin typeface="Cambria"/>
+              </a:rPr>
+              <a:t>Like </a:t>
+            </a:r>
+            <a:r>
+              <a:rPr sz="2500" b="0" dirty="0" err="1">
+                <a:latin typeface="Cambria"/>
+              </a:rPr>
+              <a:t>const</a:t>
+            </a:r>
+            <a:r>
+              <a:rPr sz="2500" b="0" dirty="0">
+                <a:latin typeface="Cambria"/>
+              </a:rPr>
+              <a:t> &amp; in C++, but the &amp; is </a:t>
+            </a:r>
+            <a:r>
+              <a:rPr sz="2500" b="1" dirty="0" smtClean="0">
                 <a:latin typeface="Cambria"/>
               </a:rPr>
               <a:t>visible</a:t>
             </a:r>
-          </a:p>
-          <a:p>
-            <a:pPr>
-              <a:tabLst>
-                <a:tab pos="3840480" algn="l"/>
-              </a:tabLst>
-            </a:pPr>
-            <a:r>
-              <a:rPr sz="2500" b="0">
-                <a:latin typeface="Cambria"/>
-              </a:rPr>
-              <a:t>at the call</a:t>
+            <a:r>
+              <a:rPr lang="en-US" sz="2500" b="1" dirty="0" smtClean="0">
+                <a:latin typeface="Cambria"/>
+              </a:rPr>
+              <a:t> </a:t>
+            </a:r>
+            <a:r>
+              <a:rPr sz="2500" b="0" dirty="0" smtClean="0">
+                <a:latin typeface="Cambria"/>
+              </a:rPr>
+              <a:t>at </a:t>
+            </a:r>
+            <a:r>
+              <a:rPr sz="2500" b="0" dirty="0">
+                <a:latin typeface="Cambria"/>
+              </a:rPr>
+              <a:t>the call</a:t>
             </a:r>
           </a:p>
         </p:txBody>
@@ -60061,7 +60297,7 @@
         <p:spPr>
           <a:xfrm>
             <a:off x="580041" y="1949942"/>
-            <a:ext cx="8135334" cy="5593858"/>
+            <a:ext cx="8135334" cy="3170099"/>
           </a:xfrm>
           <a:prstGeom prst="rect">
             <a:avLst/>
@@ -60080,10 +60316,34 @@
               </a:tabLst>
             </a:pPr>
             <a:r>
-              <a:rPr sz="2500" b="0">
-                <a:latin typeface="Cambria"/>
-              </a:rPr>
-              <a:t>C:	sample_update ( &amp;my_sample, 1456 ) ;</a:t>
+              <a:rPr sz="2500" b="0" dirty="0">
+                <a:latin typeface="Cambria"/>
+              </a:rPr>
+              <a:t>C:	</a:t>
+            </a:r>
+            <a:r>
+              <a:rPr sz="2500" b="0" dirty="0" err="1">
+                <a:latin typeface="Cambria"/>
+              </a:rPr>
+              <a:t>sample_update</a:t>
+            </a:r>
+            <a:r>
+              <a:rPr sz="2500" b="0" dirty="0">
+                <a:latin typeface="Cambria"/>
+              </a:rPr>
+              <a:t> ( &amp;</a:t>
+            </a:r>
+            <a:r>
+              <a:rPr sz="2500" b="0" dirty="0" err="1">
+                <a:latin typeface="Cambria"/>
+              </a:rPr>
+              <a:t>my_sample</a:t>
+            </a:r>
+            <a:r>
+              <a:rPr sz="2500" b="0" dirty="0">
+                <a:latin typeface="Cambria"/>
+              </a:rPr>
+              <a:t>, 1456 ) ;</a:t>
             </a:r>
           </a:p>
           <a:p>
@@ -60093,7 +60353,7 @@
               </a:tabLst>
             </a:pPr>
             <a:r>
-              <a:rPr sz="2500">
+              <a:rPr sz="2500" dirty="0">
                 <a:latin typeface="Cambria"/>
               </a:rPr>
               <a:t> </a:t>
@@ -60106,10 +60366,22 @@
               </a:tabLst>
             </a:pPr>
             <a:r>
-              <a:rPr sz="2500" b="0">
-                <a:latin typeface="Cambria"/>
-              </a:rPr>
-              <a:t>C++:	my_sample.update ( 1456 ) ;</a:t>
+              <a:rPr sz="2500" b="0" dirty="0">
+                <a:latin typeface="Cambria"/>
+              </a:rPr>
+              <a:t>C++:	</a:t>
+            </a:r>
+            <a:r>
+              <a:rPr sz="2500" b="0" dirty="0" err="1">
+                <a:latin typeface="Cambria"/>
+              </a:rPr>
+              <a:t>my_sample.update</a:t>
+            </a:r>
+            <a:r>
+              <a:rPr sz="2500" b="0" dirty="0">
+                <a:latin typeface="Cambria"/>
+              </a:rPr>
+              <a:t> ( 1456 ) ;</a:t>
             </a:r>
           </a:p>
           <a:p>
@@ -60119,7 +60391,7 @@
               </a:tabLst>
             </a:pPr>
             <a:r>
-              <a:rPr sz="2500">
+              <a:rPr sz="2500" dirty="0">
                 <a:latin typeface="Cambria"/>
               </a:rPr>
               <a:t> </a:t>
@@ -60132,10 +60404,22 @@
               </a:tabLst>
             </a:pPr>
             <a:r>
-              <a:rPr sz="2500" b="0">
-                <a:latin typeface="Cambria"/>
-              </a:rPr>
-              <a:t>Rust:	my_sample.update ( 1456 ) ;</a:t>
+              <a:rPr sz="2500" b="0" dirty="0">
+                <a:latin typeface="Cambria"/>
+              </a:rPr>
+              <a:t>Rust:	</a:t>
+            </a:r>
+            <a:r>
+              <a:rPr sz="2500" b="0" dirty="0" err="1">
+                <a:latin typeface="Cambria"/>
+              </a:rPr>
+              <a:t>my_sample.update</a:t>
+            </a:r>
+            <a:r>
+              <a:rPr sz="2500" b="0" dirty="0">
+                <a:latin typeface="Cambria"/>
+              </a:rPr>
+              <a:t> ( 1456 ) ;</a:t>
             </a:r>
           </a:p>
           <a:p>
@@ -60145,7 +60429,7 @@
               </a:tabLst>
             </a:pPr>
             <a:r>
-              <a:rPr sz="2500">
+              <a:rPr sz="2500" dirty="0">
                 <a:latin typeface="Cambria"/>
               </a:rPr>
               <a:t> </a:t>
@@ -60158,23 +60442,34 @@
               </a:tabLst>
             </a:pPr>
             <a:r>
-              <a:rPr sz="2500" b="0">
-                <a:latin typeface="Cambria"/>
-              </a:rPr>
-              <a:t>In all three the function receives the</a:t>
-            </a:r>
-          </a:p>
-          <a:p>
-            <a:pPr>
-              <a:tabLst>
-                <a:tab pos="1280160" algn="l"/>
-              </a:tabLst>
-            </a:pPr>
-            <a:r>
-              <a:rPr sz="2500" b="1">
-                <a:latin typeface="Cambria"/>
-              </a:rPr>
-              <a:t>address of the instance</a:t>
+              <a:rPr sz="2500" b="0" dirty="0">
+                <a:latin typeface="Cambria"/>
+              </a:rPr>
+              <a:t>In all three the function receives </a:t>
+            </a:r>
+            <a:r>
+              <a:rPr sz="2500" b="0" dirty="0" smtClean="0">
+                <a:latin typeface="Cambria"/>
+              </a:rPr>
+              <a:t>the</a:t>
+            </a:r>
+            <a:r>
+              <a:rPr lang="en-US" sz="2500" b="0" dirty="0" smtClean="0">
+                <a:latin typeface="Cambria"/>
+              </a:rPr>
+              <a:t> </a:t>
+            </a:r>
+            <a:r>
+              <a:rPr sz="2500" b="1" dirty="0" smtClean="0">
+                <a:latin typeface="Cambria"/>
+              </a:rPr>
+              <a:t>address </a:t>
+            </a:r>
+            <a:r>
+              <a:rPr sz="2500" b="1" dirty="0">
+                <a:latin typeface="Cambria"/>
+              </a:rPr>
+              <a:t>of the instance</a:t>
             </a:r>
           </a:p>
         </p:txBody>
